--- a/ppt/第8课_大模型与机器人整合.pptx
+++ b/ppt/第8课_大模型与机器人整合.pptx
@@ -9,19 +9,20 @@
     <p:notesMasterId r:id="rId6"/>
   </p:notesMasterIdLst>
   <p:handoutMasterIdLst>
-    <p:handoutMasterId r:id="rId15"/>
+    <p:handoutMasterId r:id="rId16"/>
   </p:handoutMasterIdLst>
   <p:sldIdLst>
     <p:sldId id="463" r:id="rId4"/>
     <p:sldId id="364" r:id="rId5"/>
-    <p:sldId id="451" r:id="rId7"/>
-    <p:sldId id="464" r:id="rId8"/>
-    <p:sldId id="465" r:id="rId9"/>
-    <p:sldId id="467" r:id="rId10"/>
-    <p:sldId id="468" r:id="rId11"/>
-    <p:sldId id="469" r:id="rId12"/>
-    <p:sldId id="356" r:id="rId13"/>
-    <p:sldId id="320" r:id="rId14"/>
+    <p:sldId id="470" r:id="rId7"/>
+    <p:sldId id="451" r:id="rId8"/>
+    <p:sldId id="464" r:id="rId9"/>
+    <p:sldId id="465" r:id="rId10"/>
+    <p:sldId id="467" r:id="rId11"/>
+    <p:sldId id="468" r:id="rId12"/>
+    <p:sldId id="469" r:id="rId13"/>
+    <p:sldId id="356" r:id="rId14"/>
+    <p:sldId id="320" r:id="rId15"/>
   </p:sldIdLst>
   <p:sldSz cx="12192000" cy="6858000"/>
   <p:notesSz cx="6858000" cy="9144000"/>
@@ -128,7 +129,7 @@
             <a:srgbClr val="A4A3A4"/>
           </p15:clr>
         </p15:guide>
-        <p15:guide id="2" orient="horz" pos="2282" userDrawn="1">
+        <p15:guide id="2" orient="horz" pos="2268" userDrawn="1">
           <p15:clr>
             <a:srgbClr val="A4A3A4"/>
           </p15:clr>
@@ -651,6 +652,84 @@
 </file>
 
 <file path=ppt/notesSlides/notesSlide1.xml><?xml version="1.0" encoding="utf-8"?>
+<p:notes xmlns:a="http://schemas.openxmlformats.org/drawingml/2006/main" xmlns:r="http://schemas.openxmlformats.org/officeDocument/2006/relationships" xmlns:p="http://schemas.openxmlformats.org/presentationml/2006/main">
+  <p:cSld>
+    <p:spTree>
+      <p:nvGrpSpPr>
+        <p:cNvPr id="1" name=""/>
+        <p:cNvGrpSpPr/>
+        <p:nvPr/>
+      </p:nvGrpSpPr>
+      <p:grpSpPr>
+        <a:xfrm>
+          <a:off x="0" y="0"/>
+          <a:ext cx="0" cy="0"/>
+          <a:chOff x="0" y="0"/>
+          <a:chExt cx="0" cy="0"/>
+        </a:xfrm>
+      </p:grpSpPr>
+      <p:sp>
+        <p:nvSpPr>
+          <p:cNvPr id="2" name="幻灯片图像占位符 1"/>
+          <p:cNvSpPr>
+            <a:spLocks noGrp="1" noRot="1" noChangeAspect="1"/>
+          </p:cNvSpPr>
+          <p:nvPr>
+            <p:ph type="sldImg"/>
+          </p:nvPr>
+        </p:nvSpPr>
+        <p:spPr/>
+      </p:sp>
+      <p:sp>
+        <p:nvSpPr>
+          <p:cNvPr id="3" name="备注占位符 2"/>
+          <p:cNvSpPr>
+            <a:spLocks noGrp="1"/>
+          </p:cNvSpPr>
+          <p:nvPr>
+            <p:ph type="body" idx="1"/>
+          </p:nvPr>
+        </p:nvSpPr>
+        <p:spPr/>
+        <p:txBody>
+          <a:bodyPr/>
+          <a:lstStyle/>
+          <a:p>
+            <a:endParaRPr lang="zh-CN" altLang="en-US" dirty="0"/>
+          </a:p>
+        </p:txBody>
+      </p:sp>
+      <p:sp>
+        <p:nvSpPr>
+          <p:cNvPr id="4" name="灯片编号占位符 3"/>
+          <p:cNvSpPr>
+            <a:spLocks noGrp="1"/>
+          </p:cNvSpPr>
+          <p:nvPr>
+            <p:ph type="sldNum" sz="quarter" idx="10"/>
+          </p:nvPr>
+        </p:nvSpPr>
+        <p:spPr/>
+        <p:txBody>
+          <a:bodyPr/>
+          <a:lstStyle/>
+          <a:p>
+            <a:fld id="{CD629C50-E8D2-44C1-A6BB-3798535718E9}" type="slidenum">
+              <a:rPr lang="zh-CN" altLang="en-US" smtClean="0"/>
+            </a:fld>
+            <a:endParaRPr lang="zh-CN" altLang="en-US"/>
+          </a:p>
+        </p:txBody>
+      </p:sp>
+    </p:spTree>
+  </p:cSld>
+  <p:clrMapOvr>
+    <a:masterClrMapping/>
+  </p:clrMapOvr>
+</p:notes>
+</file>
+
+<file path=ppt/notesSlides/notesSlide10.xml><?xml version="1.0" encoding="utf-8"?>
 <p:notes xmlns:a="http://schemas.openxmlformats.org/drawingml/2006/main" xmlns:r="http://schemas.openxmlformats.org/officeDocument/2006/relationships" xmlns:p="http://schemas.openxmlformats.org/presentationml/2006/main">
   <p:cSld>
     <p:spTree>
@@ -7620,6 +7699,185 @@
       </p:grpSpPr>
       <p:sp>
         <p:nvSpPr>
+          <p:cNvPr id="2" name="矩形 1"/>
+          <p:cNvSpPr/>
+          <p:nvPr/>
+        </p:nvSpPr>
+        <p:spPr>
+          <a:xfrm>
+            <a:off x="985489" y="294717"/>
+            <a:ext cx="5659151" cy="460375"/>
+          </a:xfrm>
+          <a:prstGeom prst="rect">
+            <a:avLst/>
+          </a:prstGeom>
+        </p:spPr>
+        <p:txBody>
+          <a:bodyPr wrap="square">
+            <a:spAutoFit/>
+          </a:bodyPr>
+          <a:lstStyle/>
+          <a:p>
+            <a:r>
+              <a:rPr lang="zh-CN" altLang="en-US" sz="2400" b="1" dirty="0"/>
+              <a:t>练习</a:t>
+            </a:r>
+            <a:endParaRPr lang="zh-CN" altLang="en-US" sz="2400" b="1" dirty="0"/>
+          </a:p>
+        </p:txBody>
+      </p:sp>
+      <p:sp>
+        <p:nvSpPr>
+          <p:cNvPr id="6" name="文本框 5"/>
+          <p:cNvSpPr txBox="1"/>
+          <p:nvPr/>
+        </p:nvSpPr>
+        <p:spPr>
+          <a:xfrm>
+            <a:off x="1199515" y="1060450"/>
+            <a:ext cx="9382760" cy="1872615"/>
+          </a:xfrm>
+          <a:prstGeom prst="rect">
+            <a:avLst/>
+          </a:prstGeom>
+          <a:noFill/>
+        </p:spPr>
+        <p:txBody>
+          <a:bodyPr wrap="square" rtlCol="0">
+            <a:noAutofit/>
+          </a:bodyPr>
+          <a:p>
+            <a:pPr>
+              <a:lnSpc>
+                <a:spcPct val="130000"/>
+              </a:lnSpc>
+            </a:pPr>
+            <a:r>
+              <a:rPr lang="en-US" altLang="zh-CN" sz="2400"/>
+              <a:t>1. </a:t>
+            </a:r>
+            <a:r>
+              <a:rPr lang="zh-CN" altLang="en-US" sz="2400"/>
+              <a:t>使用已学模块，实现一个综合</a:t>
+            </a:r>
+            <a:r>
+              <a:rPr lang="zh-CN" altLang="en-US" sz="2400"/>
+              <a:t>功能。</a:t>
+            </a:r>
+            <a:endParaRPr lang="zh-CN" altLang="en-US" sz="2400"/>
+          </a:p>
+          <a:p>
+            <a:pPr>
+              <a:lnSpc>
+                <a:spcPct val="130000"/>
+              </a:lnSpc>
+            </a:pPr>
+            <a:r>
+              <a:rPr lang="en-US" altLang="zh-CN" sz="2400"/>
+              <a:t>2. </a:t>
+            </a:r>
+            <a:r>
+              <a:rPr lang="zh-CN" altLang="en-US" sz="2400"/>
+              <a:t>录制完整的机器人演示视频。</a:t>
+            </a:r>
+            <a:endParaRPr lang="zh-CN" altLang="en-US" sz="2400"/>
+          </a:p>
+          <a:p>
+            <a:pPr>
+              <a:lnSpc>
+                <a:spcPct val="130000"/>
+              </a:lnSpc>
+            </a:pPr>
+            <a:r>
+              <a:rPr lang="en-US" altLang="zh-CN" sz="2400"/>
+              <a:t>3.</a:t>
+            </a:r>
+            <a:r>
+              <a:rPr lang="zh-CN" altLang="en-US" sz="2400"/>
+              <a:t>制作</a:t>
+            </a:r>
+            <a:r>
+              <a:rPr lang="en-US" altLang="zh-CN" sz="2400"/>
+              <a:t>ppt</a:t>
+            </a:r>
+            <a:r>
+              <a:rPr lang="zh-CN" altLang="en-US" sz="2400"/>
+              <a:t>，在最后一节课简单讲解各个功能设计。</a:t>
+            </a:r>
+            <a:endParaRPr lang="zh-CN" altLang="en-US" sz="2400"/>
+          </a:p>
+          <a:p>
+            <a:pPr>
+              <a:lnSpc>
+                <a:spcPct val="130000"/>
+              </a:lnSpc>
+            </a:pPr>
+            <a:r>
+              <a:rPr lang="en-US" altLang="zh-CN" sz="2400"/>
+              <a:t>4.</a:t>
+            </a:r>
+            <a:r>
+              <a:rPr lang="zh-CN" altLang="en-US" sz="2400"/>
+              <a:t>将代码、</a:t>
+            </a:r>
+            <a:r>
+              <a:rPr lang="en-US" altLang="zh-CN" sz="2400"/>
+              <a:t>ppt</a:t>
+            </a:r>
+            <a:r>
+              <a:rPr lang="zh-CN" altLang="en-US" sz="2400"/>
+              <a:t>、演示</a:t>
+            </a:r>
+            <a:r>
+              <a:rPr lang="zh-CN" altLang="en-US" sz="2400"/>
+              <a:t>视频推送到</a:t>
+            </a:r>
+            <a:r>
+              <a:rPr lang="en-US" altLang="zh-CN" sz="2400"/>
+              <a:t>github</a:t>
+            </a:r>
+            <a:r>
+              <a:rPr lang="zh-CN" altLang="en-US" sz="2400"/>
+              <a:t>。</a:t>
+            </a:r>
+            <a:endParaRPr lang="zh-CN" altLang="en-US" sz="2400"/>
+          </a:p>
+        </p:txBody>
+      </p:sp>
+    </p:spTree>
+  </p:cSld>
+  <p:clrMapOvr>
+    <a:masterClrMapping/>
+  </p:clrMapOvr>
+  <p:timing>
+    <p:tnLst>
+      <p:par>
+        <p:cTn id="1" dur="indefinite" restart="never" nodeType="tmRoot"/>
+      </p:par>
+    </p:tnLst>
+  </p:timing>
+</p:sld>
+</file>
+
+<file path=ppt/slides/slide11.xml><?xml version="1.0" encoding="utf-8"?>
+<p:sld xmlns:a="http://schemas.openxmlformats.org/drawingml/2006/main" xmlns:r="http://schemas.openxmlformats.org/officeDocument/2006/relationships" xmlns:p="http://schemas.openxmlformats.org/presentationml/2006/main">
+  <p:cSld>
+    <p:spTree>
+      <p:nvGrpSpPr>
+        <p:cNvPr id="1" name=""/>
+        <p:cNvGrpSpPr/>
+        <p:nvPr/>
+      </p:nvGrpSpPr>
+      <p:grpSpPr>
+        <a:xfrm>
+          <a:off x="0" y="0"/>
+          <a:ext cx="0" cy="0"/>
+          <a:chOff x="0" y="0"/>
+          <a:chExt cx="0" cy="0"/>
+        </a:xfrm>
+      </p:grpSpPr>
+      <p:sp>
+        <p:nvSpPr>
           <p:cNvPr id="2" name="文本框 1"/>
           <p:cNvSpPr txBox="1"/>
           <p:nvPr/>
@@ -7844,6 +8102,221 @@
           <a:p>
             <a:r>
               <a:rPr lang="zh-CN" altLang="en-US" sz="2400" b="1" dirty="0"/>
+              <a:t>启动</a:t>
+            </a:r>
+            <a:r>
+              <a:rPr lang="zh-CN" altLang="en-US" sz="2400" b="1" dirty="0"/>
+              <a:t>程序</a:t>
+            </a:r>
+            <a:endParaRPr lang="zh-CN" altLang="en-US" sz="2400" b="1" dirty="0"/>
+          </a:p>
+        </p:txBody>
+      </p:sp>
+      <p:sp>
+        <p:nvSpPr>
+          <p:cNvPr id="4" name="文本框 3"/>
+          <p:cNvSpPr txBox="1"/>
+          <p:nvPr/>
+        </p:nvSpPr>
+        <p:spPr>
+          <a:xfrm>
+            <a:off x="1042670" y="1339850"/>
+            <a:ext cx="10248900" cy="1946910"/>
+          </a:xfrm>
+          <a:prstGeom prst="rect">
+            <a:avLst/>
+          </a:prstGeom>
+          <a:noFill/>
+        </p:spPr>
+        <p:txBody>
+          <a:bodyPr wrap="square" rtlCol="0">
+            <a:noAutofit/>
+          </a:bodyPr>
+          <a:p>
+            <a:pPr indent="457200">
+              <a:lnSpc>
+                <a:spcPct val="120000"/>
+              </a:lnSpc>
+            </a:pPr>
+            <a:r>
+              <a:rPr lang="zh-CN" altLang="en-US"/>
+              <a:t>先在电脑上运行</a:t>
+            </a:r>
+            <a:r>
+              <a:rPr lang="en-US" altLang="zh-CN"/>
+              <a:t>w08/mcp_client.py</a:t>
+            </a:r>
+            <a:r>
+              <a:rPr lang="zh-CN" altLang="en-US"/>
+              <a:t>，这个程序会启动多个服务：</a:t>
+            </a:r>
+            <a:r>
+              <a:rPr lang="en-US" altLang="zh-CN"/>
+              <a:t>socketServer</a:t>
+            </a:r>
+            <a:r>
+              <a:rPr lang="zh-CN" altLang="en-US"/>
+              <a:t>、</a:t>
+            </a:r>
+            <a:r>
+              <a:rPr lang="en-US" altLang="zh-CN"/>
+              <a:t>TTSServer</a:t>
+            </a:r>
+            <a:r>
+              <a:rPr lang="zh-CN" altLang="en-US"/>
+              <a:t>、</a:t>
+            </a:r>
+            <a:r>
+              <a:rPr lang="en-US" altLang="zh-CN"/>
+              <a:t>ASRServer</a:t>
+            </a:r>
+            <a:r>
+              <a:rPr lang="zh-CN" altLang="en-US"/>
+              <a:t>、</a:t>
+            </a:r>
+            <a:r>
+              <a:rPr lang="en-US" altLang="zh-CN"/>
+              <a:t>MCPServer</a:t>
+            </a:r>
+            <a:r>
+              <a:rPr lang="zh-CN" altLang="en-US"/>
+              <a:t>。</a:t>
+            </a:r>
+            <a:endParaRPr lang="zh-CN" altLang="en-US"/>
+          </a:p>
+          <a:p>
+            <a:pPr indent="457200">
+              <a:lnSpc>
+                <a:spcPct val="120000"/>
+              </a:lnSpc>
+            </a:pPr>
+            <a:r>
+              <a:rPr lang="zh-CN" altLang="en-US"/>
+              <a:t>然后在机器人上运行</a:t>
+            </a:r>
+            <a:r>
+              <a:rPr lang="en-US" altLang="zh-CN"/>
+              <a:t>w08/robot_client.py</a:t>
+            </a:r>
+            <a:r>
+              <a:rPr lang="zh-CN" altLang="en-US"/>
+              <a:t>以及</a:t>
+            </a:r>
+            <a:r>
+              <a:rPr lang="en-US" altLang="zh-CN"/>
+              <a:t>launch.py</a:t>
+            </a:r>
+            <a:r>
+              <a:rPr lang="zh-CN" altLang="en-US"/>
+              <a:t>，这个程序会启动多个客户端连接：</a:t>
+            </a:r>
+            <a:r>
+              <a:rPr lang="en-US" altLang="zh-CN"/>
+              <a:t>socketClient</a:t>
+            </a:r>
+            <a:r>
+              <a:rPr lang="zh-CN" altLang="en-US"/>
+              <a:t>、</a:t>
+            </a:r>
+            <a:r>
+              <a:rPr lang="en-US" altLang="zh-CN"/>
+              <a:t>AudioSendClient</a:t>
+            </a:r>
+            <a:r>
+              <a:rPr lang="zh-CN" altLang="en-US"/>
+              <a:t>、</a:t>
+            </a:r>
+            <a:r>
+              <a:rPr lang="en-US" altLang="zh-CN"/>
+              <a:t>AudioReceiveClient</a:t>
+            </a:r>
+            <a:r>
+              <a:rPr lang="zh-CN" altLang="en-US"/>
+              <a:t>、</a:t>
+            </a:r>
+            <a:r>
+              <a:rPr lang="en-US" altLang="zh-CN"/>
+              <a:t>TouchSensor</a:t>
+            </a:r>
+            <a:r>
+              <a:rPr lang="zh-CN" altLang="en-US"/>
+              <a:t>、</a:t>
+            </a:r>
+            <a:r>
+              <a:rPr lang="en-US" altLang="zh-CN"/>
+              <a:t>ActionController</a:t>
+            </a:r>
+            <a:r>
+              <a:rPr lang="zh-CN" altLang="en-US"/>
+              <a:t>。</a:t>
+            </a:r>
+            <a:endParaRPr lang="zh-CN" altLang="en-US"/>
+          </a:p>
+          <a:p>
+            <a:pPr indent="457200">
+              <a:lnSpc>
+                <a:spcPct val="120000"/>
+              </a:lnSpc>
+            </a:pPr>
+            <a:endParaRPr lang="zh-CN" altLang="en-US"/>
+          </a:p>
+        </p:txBody>
+      </p:sp>
+    </p:spTree>
+  </p:cSld>
+  <p:clrMapOvr>
+    <a:masterClrMapping/>
+  </p:clrMapOvr>
+  <p:timing>
+    <p:tnLst>
+      <p:par>
+        <p:cTn id="1" dur="indefinite" restart="never" nodeType="tmRoot"/>
+      </p:par>
+    </p:tnLst>
+  </p:timing>
+</p:sld>
+</file>
+
+<file path=ppt/slides/slide3.xml><?xml version="1.0" encoding="utf-8"?>
+<p:sld xmlns:a="http://schemas.openxmlformats.org/drawingml/2006/main" xmlns:r="http://schemas.openxmlformats.org/officeDocument/2006/relationships" xmlns:p="http://schemas.openxmlformats.org/presentationml/2006/main">
+  <p:cSld>
+    <p:spTree>
+      <p:nvGrpSpPr>
+        <p:cNvPr id="1" name=""/>
+        <p:cNvGrpSpPr/>
+        <p:nvPr/>
+      </p:nvGrpSpPr>
+      <p:grpSpPr>
+        <a:xfrm>
+          <a:off x="0" y="0"/>
+          <a:ext cx="0" cy="0"/>
+          <a:chOff x="0" y="0"/>
+          <a:chExt cx="0" cy="0"/>
+        </a:xfrm>
+      </p:grpSpPr>
+      <p:sp>
+        <p:nvSpPr>
+          <p:cNvPr id="2" name="矩形 1"/>
+          <p:cNvSpPr/>
+          <p:nvPr/>
+        </p:nvSpPr>
+        <p:spPr>
+          <a:xfrm>
+            <a:off x="985489" y="294717"/>
+            <a:ext cx="5659151" cy="460375"/>
+          </a:xfrm>
+          <a:prstGeom prst="rect">
+            <a:avLst/>
+          </a:prstGeom>
+        </p:spPr>
+        <p:txBody>
+          <a:bodyPr wrap="square">
+            <a:spAutoFit/>
+          </a:bodyPr>
+          <a:lstStyle/>
+          <a:p>
+            <a:r>
+              <a:rPr lang="zh-CN" altLang="en-US" sz="2400" b="1" dirty="0"/>
               <a:t>整体架构</a:t>
             </a:r>
             <a:endParaRPr lang="zh-CN" altLang="en-US" sz="2400" b="1" dirty="0"/>
@@ -7852,7 +8325,7 @@
       </p:sp>
       <p:pic>
         <p:nvPicPr>
-          <p:cNvPr id="7" name="图片 6"/>
+          <p:cNvPr id="3" name="图片 2"/>
           <p:cNvPicPr/>
           <p:nvPr/>
         </p:nvPicPr>
@@ -7864,8 +8337,8 @@
         </p:blipFill>
         <p:spPr>
           <a:xfrm>
-            <a:off x="2027555" y="934720"/>
-            <a:ext cx="8462010" cy="5570855"/>
+            <a:off x="2051050" y="1016000"/>
+            <a:ext cx="7853680" cy="5169535"/>
           </a:xfrm>
           <a:prstGeom prst="rect">
             <a:avLst/>
@@ -7887,7 +8360,7 @@
 </p:sld>
 </file>
 
-<file path=ppt/slides/slide3.xml><?xml version="1.0" encoding="utf-8"?>
+<file path=ppt/slides/slide4.xml><?xml version="1.0" encoding="utf-8"?>
 <p:sld xmlns:a="http://schemas.openxmlformats.org/drawingml/2006/main" xmlns:r="http://schemas.openxmlformats.org/officeDocument/2006/relationships" xmlns:p="http://schemas.openxmlformats.org/presentationml/2006/main">
   <p:cSld>
     <p:spTree>
@@ -7992,7 +8465,7 @@
 </p:sld>
 </file>
 
-<file path=ppt/slides/slide4.xml><?xml version="1.0" encoding="utf-8"?>
+<file path=ppt/slides/slide5.xml><?xml version="1.0" encoding="utf-8"?>
 <p:sld xmlns:a="http://schemas.openxmlformats.org/drawingml/2006/main" xmlns:r="http://schemas.openxmlformats.org/officeDocument/2006/relationships" xmlns:p="http://schemas.openxmlformats.org/presentationml/2006/main">
   <p:cSld>
     <p:spTree>
@@ -8097,7 +8570,7 @@
 </p:sld>
 </file>
 
-<file path=ppt/slides/slide5.xml><?xml version="1.0" encoding="utf-8"?>
+<file path=ppt/slides/slide6.xml><?xml version="1.0" encoding="utf-8"?>
 <p:sld xmlns:a="http://schemas.openxmlformats.org/drawingml/2006/main" xmlns:r="http://schemas.openxmlformats.org/officeDocument/2006/relationships" xmlns:p="http://schemas.openxmlformats.org/presentationml/2006/main">
   <p:cSld>
     <p:spTree>
@@ -8184,7 +8657,7 @@
 </p:sld>
 </file>
 
-<file path=ppt/slides/slide6.xml><?xml version="1.0" encoding="utf-8"?>
+<file path=ppt/slides/slide7.xml><?xml version="1.0" encoding="utf-8"?>
 <p:sld xmlns:a="http://schemas.openxmlformats.org/drawingml/2006/main" xmlns:r="http://schemas.openxmlformats.org/officeDocument/2006/relationships" xmlns:p="http://schemas.openxmlformats.org/presentationml/2006/main">
   <p:cSld>
     <p:spTree>
@@ -8370,7 +8843,7 @@
 </p:sld>
 </file>
 
-<file path=ppt/slides/slide7.xml><?xml version="1.0" encoding="utf-8"?>
+<file path=ppt/slides/slide8.xml><?xml version="1.0" encoding="utf-8"?>
 <p:sld xmlns:a="http://schemas.openxmlformats.org/drawingml/2006/main" xmlns:r="http://schemas.openxmlformats.org/officeDocument/2006/relationships" xmlns:p="http://schemas.openxmlformats.org/presentationml/2006/main">
   <p:cSld>
     <p:spTree>
@@ -8453,7 +8926,7 @@
 </p:sld>
 </file>
 
-<file path=ppt/slides/slide8.xml><?xml version="1.0" encoding="utf-8"?>
+<file path=ppt/slides/slide9.xml><?xml version="1.0" encoding="utf-8"?>
 <p:sld xmlns:a="http://schemas.openxmlformats.org/drawingml/2006/main" xmlns:r="http://schemas.openxmlformats.org/officeDocument/2006/relationships" xmlns:p="http://schemas.openxmlformats.org/presentationml/2006/main">
   <p:cSld>
     <p:spTree>
@@ -8521,185 +8994,6 @@
           </a:prstGeom>
         </p:spPr>
       </p:pic>
-    </p:spTree>
-  </p:cSld>
-  <p:clrMapOvr>
-    <a:masterClrMapping/>
-  </p:clrMapOvr>
-  <p:timing>
-    <p:tnLst>
-      <p:par>
-        <p:cTn id="1" dur="indefinite" restart="never" nodeType="tmRoot"/>
-      </p:par>
-    </p:tnLst>
-  </p:timing>
-</p:sld>
-</file>
-
-<file path=ppt/slides/slide9.xml><?xml version="1.0" encoding="utf-8"?>
-<p:sld xmlns:a="http://schemas.openxmlformats.org/drawingml/2006/main" xmlns:r="http://schemas.openxmlformats.org/officeDocument/2006/relationships" xmlns:p="http://schemas.openxmlformats.org/presentationml/2006/main">
-  <p:cSld>
-    <p:spTree>
-      <p:nvGrpSpPr>
-        <p:cNvPr id="1" name=""/>
-        <p:cNvGrpSpPr/>
-        <p:nvPr/>
-      </p:nvGrpSpPr>
-      <p:grpSpPr>
-        <a:xfrm>
-          <a:off x="0" y="0"/>
-          <a:ext cx="0" cy="0"/>
-          <a:chOff x="0" y="0"/>
-          <a:chExt cx="0" cy="0"/>
-        </a:xfrm>
-      </p:grpSpPr>
-      <p:sp>
-        <p:nvSpPr>
-          <p:cNvPr id="2" name="矩形 1"/>
-          <p:cNvSpPr/>
-          <p:nvPr/>
-        </p:nvSpPr>
-        <p:spPr>
-          <a:xfrm>
-            <a:off x="985489" y="294717"/>
-            <a:ext cx="5659151" cy="460375"/>
-          </a:xfrm>
-          <a:prstGeom prst="rect">
-            <a:avLst/>
-          </a:prstGeom>
-        </p:spPr>
-        <p:txBody>
-          <a:bodyPr wrap="square">
-            <a:spAutoFit/>
-          </a:bodyPr>
-          <a:lstStyle/>
-          <a:p>
-            <a:r>
-              <a:rPr lang="zh-CN" altLang="en-US" sz="2400" b="1" dirty="0"/>
-              <a:t>练习</a:t>
-            </a:r>
-            <a:endParaRPr lang="zh-CN" altLang="en-US" sz="2400" b="1" dirty="0"/>
-          </a:p>
-        </p:txBody>
-      </p:sp>
-      <p:sp>
-        <p:nvSpPr>
-          <p:cNvPr id="6" name="文本框 5"/>
-          <p:cNvSpPr txBox="1"/>
-          <p:nvPr/>
-        </p:nvSpPr>
-        <p:spPr>
-          <a:xfrm>
-            <a:off x="1199515" y="1060450"/>
-            <a:ext cx="9382760" cy="1872615"/>
-          </a:xfrm>
-          <a:prstGeom prst="rect">
-            <a:avLst/>
-          </a:prstGeom>
-          <a:noFill/>
-        </p:spPr>
-        <p:txBody>
-          <a:bodyPr wrap="square" rtlCol="0">
-            <a:noAutofit/>
-          </a:bodyPr>
-          <a:p>
-            <a:pPr>
-              <a:lnSpc>
-                <a:spcPct val="130000"/>
-              </a:lnSpc>
-            </a:pPr>
-            <a:r>
-              <a:rPr lang="en-US" altLang="zh-CN" sz="2400"/>
-              <a:t>1. </a:t>
-            </a:r>
-            <a:r>
-              <a:rPr lang="zh-CN" altLang="en-US" sz="2400"/>
-              <a:t>使用已学模块，实现一个综合</a:t>
-            </a:r>
-            <a:r>
-              <a:rPr lang="zh-CN" altLang="en-US" sz="2400"/>
-              <a:t>功能。</a:t>
-            </a:r>
-            <a:endParaRPr lang="zh-CN" altLang="en-US" sz="2400"/>
-          </a:p>
-          <a:p>
-            <a:pPr>
-              <a:lnSpc>
-                <a:spcPct val="130000"/>
-              </a:lnSpc>
-            </a:pPr>
-            <a:r>
-              <a:rPr lang="en-US" altLang="zh-CN" sz="2400"/>
-              <a:t>2. </a:t>
-            </a:r>
-            <a:r>
-              <a:rPr lang="zh-CN" altLang="en-US" sz="2400"/>
-              <a:t>录制完整的机器人演示视频。</a:t>
-            </a:r>
-            <a:endParaRPr lang="zh-CN" altLang="en-US" sz="2400"/>
-          </a:p>
-          <a:p>
-            <a:pPr>
-              <a:lnSpc>
-                <a:spcPct val="130000"/>
-              </a:lnSpc>
-            </a:pPr>
-            <a:r>
-              <a:rPr lang="en-US" altLang="zh-CN" sz="2400"/>
-              <a:t>3.</a:t>
-            </a:r>
-            <a:r>
-              <a:rPr lang="zh-CN" altLang="en-US" sz="2400"/>
-              <a:t>制作</a:t>
-            </a:r>
-            <a:r>
-              <a:rPr lang="en-US" altLang="zh-CN" sz="2400"/>
-              <a:t>ppt</a:t>
-            </a:r>
-            <a:r>
-              <a:rPr lang="zh-CN" altLang="en-US" sz="2400"/>
-              <a:t>，在最后一节课简单讲解各个功能设计。</a:t>
-            </a:r>
-            <a:endParaRPr lang="zh-CN" altLang="en-US" sz="2400"/>
-          </a:p>
-          <a:p>
-            <a:pPr>
-              <a:lnSpc>
-                <a:spcPct val="130000"/>
-              </a:lnSpc>
-            </a:pPr>
-            <a:r>
-              <a:rPr lang="en-US" altLang="zh-CN" sz="2400"/>
-              <a:t>4.</a:t>
-            </a:r>
-            <a:r>
-              <a:rPr lang="zh-CN" altLang="en-US" sz="2400"/>
-              <a:t>将代码、</a:t>
-            </a:r>
-            <a:r>
-              <a:rPr lang="en-US" altLang="zh-CN" sz="2400"/>
-              <a:t>ppt</a:t>
-            </a:r>
-            <a:r>
-              <a:rPr lang="zh-CN" altLang="en-US" sz="2400"/>
-              <a:t>、演示</a:t>
-            </a:r>
-            <a:r>
-              <a:rPr lang="zh-CN" altLang="en-US" sz="2400"/>
-              <a:t>视频推送到</a:t>
-            </a:r>
-            <a:r>
-              <a:rPr lang="en-US" altLang="zh-CN" sz="2400"/>
-              <a:t>github</a:t>
-            </a:r>
-            <a:r>
-              <a:rPr lang="zh-CN" altLang="en-US" sz="2400"/>
-              <a:t>。</a:t>
-            </a:r>
-            <a:endParaRPr lang="zh-CN" altLang="en-US" sz="2400"/>
-          </a:p>
-        </p:txBody>
-      </p:sp>
     </p:spTree>
   </p:cSld>
   <p:clrMapOvr>
